--- a/assets/pptx/catalog-20.pptx
+++ b/assets/pptx/catalog-20.pptx
@@ -3305,7 +3305,7 @@
                 <a:ea typeface="Ebrima"/>
                 <a:cs typeface="Ebrima"/>
               </a:rPr>
-              <a:t>በስብርባሪም ድኖ የል ሰምቶ ያመነህ (x2)</a:t>
+              <a:t>በስብርባሪም ድኖ የል ሰምቶ ያመነህ x2</a:t>
             </a:r>
           </a:p>
         </p:txBody>
@@ -3372,7 +3372,7 @@
                 <a:ea typeface="Ebrima"/>
                 <a:cs typeface="Ebrima"/>
               </a:rPr>
-              <a:t>ካየውህ (ካየውህ)</a:t>
+              <a:t>ካየውህ ካየውህ</a:t>
             </a:r>
           </a:p>
           <a:p>
@@ -3390,7 +3390,7 @@
                 <a:ea typeface="Ebrima"/>
                 <a:cs typeface="Ebrima"/>
               </a:rPr>
-              <a:t>ከሰማውህ (ከሰማውህ)</a:t>
+              <a:t>ከሰማውህ ከሰማውህ</a:t>
             </a:r>
           </a:p>
           <a:p>
@@ -3408,7 +3408,7 @@
                 <a:ea typeface="Ebrima"/>
                 <a:cs typeface="Ebrima"/>
               </a:rPr>
-              <a:t>ህይወት አለኝ አዎ እኖራለሁ (x4)</a:t>
+              <a:t>ህይወት አለኝ አዎ እኖራለሁ x4</a:t>
             </a:r>
           </a:p>
         </p:txBody>
@@ -3475,7 +3475,7 @@
                 <a:ea typeface="Ebrima"/>
                 <a:cs typeface="Ebrima"/>
               </a:rPr>
-              <a:t>ካየውህ (ካየውህ)</a:t>
+              <a:t>ካየውህ ካየውህ</a:t>
             </a:r>
           </a:p>
           <a:p>
@@ -3493,7 +3493,7 @@
                 <a:ea typeface="Ebrima"/>
                 <a:cs typeface="Ebrima"/>
               </a:rPr>
-              <a:t>ከሰማውህ (ከሰማውህ)</a:t>
+              <a:t>ከሰማውህ ከሰማውህ</a:t>
             </a:r>
           </a:p>
           <a:p>
@@ -3511,7 +3511,7 @@
                 <a:ea typeface="Ebrima"/>
                 <a:cs typeface="Ebrima"/>
               </a:rPr>
-              <a:t>ህይወት አለኝ አዎ እኖራለሁ (x4)</a:t>
+              <a:t>ህይወት አለኝ አዎ እኖራለሁ x4</a:t>
             </a:r>
           </a:p>
         </p:txBody>
@@ -3632,7 +3632,7 @@
                 <a:ea typeface="Ebrima"/>
                 <a:cs typeface="Ebrima"/>
               </a:rPr>
-              <a:t>ሊያገኝህ ሽቶ ከምንም በላይ (x2)</a:t>
+              <a:t>ሊያገኝህ ሽቶ ከምንም በላይ x2</a:t>
             </a:r>
           </a:p>
         </p:txBody>
@@ -3717,7 +3717,7 @@
                 <a:ea typeface="Ebrima"/>
                 <a:cs typeface="Ebrima"/>
               </a:rPr>
-              <a:t>ከማንም በላይ ከማንም በላይ (x2)</a:t>
+              <a:t>ከማንም በላይ ከማንም በላይ x2</a:t>
             </a:r>
           </a:p>
         </p:txBody>
@@ -3802,7 +3802,7 @@
                 <a:ea typeface="Ebrima"/>
                 <a:cs typeface="Ebrima"/>
               </a:rPr>
-              <a:t>ከምሰማው ከዓለም ወሬ ያንተ ይሰማኝ (x2)</a:t>
+              <a:t>ከምሰማው ከዓለም ወሬ ያንተ ይሰማኝ x2</a:t>
             </a:r>
           </a:p>
         </p:txBody>
@@ -4044,7 +4044,7 @@
                 <a:ea typeface="Ebrima"/>
                 <a:cs typeface="Ebrima"/>
               </a:rPr>
-              <a:t>በመንፈስህ ሁሌ አረስርሰኝ (x2)</a:t>
+              <a:t>በመንፈስህ ሁሌ አረስርሰኝ x2</a:t>
             </a:r>
           </a:p>
         </p:txBody>
@@ -4286,7 +4286,7 @@
                 <a:ea typeface="Ebrima"/>
                 <a:cs typeface="Ebrima"/>
               </a:rPr>
-              <a:t>ከስጋዬ ይልቅ መንፈሴን አንቃ (x2)</a:t>
+              <a:t>ከስጋዬ ይልቅ መንፈሴን አንቃ x2</a:t>
             </a:r>
           </a:p>
         </p:txBody>
